--- a/3.4 Hoofdstuk 4 - Internationale markten/3.4.4 Paragraaf 4 - Internationale productieketens/2. Leren/3.4.4 Internationale productieketens – presentatie.pptx
+++ b/3.4 Hoofdstuk 4 - Internationale markten/3.4.4 Paragraaf 4 - Internationale productieketens/2. Leren/3.4.4 Internationale productieketens – presentatie.pptx
@@ -1946,6 +1946,10 @@
             </a:outerShdw>
           </a:effectLst>
         </p:spPr>
+        <p:txBody>
+          <a:bodyPr/>
+          <a:p/>
+        </p:txBody>
       </p:sp>
       <p:sp>
         <p:nvSpPr>
@@ -1966,6 +1970,10 @@
           </a:solidFill>
           <a:ln/>
         </p:spPr>
+        <p:txBody>
+          <a:bodyPr/>
+          <a:p/>
+        </p:txBody>
       </p:sp>
       <p:sp>
         <p:nvSpPr>
@@ -2112,6 +2120,10 @@
             </a:outerShdw>
           </a:effectLst>
         </p:spPr>
+        <p:txBody>
+          <a:bodyPr/>
+          <a:p/>
+        </p:txBody>
       </p:sp>
       <p:sp>
         <p:nvSpPr>
@@ -2132,6 +2144,10 @@
           </a:solidFill>
           <a:ln/>
         </p:spPr>
+        <p:txBody>
+          <a:bodyPr/>
+          <a:p/>
+        </p:txBody>
       </p:sp>
       <p:sp>
         <p:nvSpPr>
@@ -2440,6 +2456,10 @@
             </a:outerShdw>
           </a:effectLst>
         </p:spPr>
+        <p:txBody>
+          <a:bodyPr/>
+          <a:p/>
+        </p:txBody>
       </p:sp>
       <p:sp>
         <p:nvSpPr>
@@ -2460,6 +2480,10 @@
           </a:solidFill>
           <a:ln/>
         </p:spPr>
+        <p:txBody>
+          <a:bodyPr/>
+          <a:p/>
+        </p:txBody>
       </p:sp>
       <p:sp>
         <p:nvSpPr>
@@ -2606,6 +2630,10 @@
             </a:outerShdw>
           </a:effectLst>
         </p:spPr>
+        <p:txBody>
+          <a:bodyPr/>
+          <a:p/>
+        </p:txBody>
       </p:sp>
       <p:sp>
         <p:nvSpPr>
@@ -2626,6 +2654,10 @@
           </a:solidFill>
           <a:ln/>
         </p:spPr>
+        <p:txBody>
+          <a:bodyPr/>
+          <a:p/>
+        </p:txBody>
       </p:sp>
       <p:sp>
         <p:nvSpPr>
@@ -2772,6 +2804,10 @@
             </a:outerShdw>
           </a:effectLst>
         </p:spPr>
+        <p:txBody>
+          <a:bodyPr/>
+          <a:p/>
+        </p:txBody>
       </p:sp>
       <p:sp>
         <p:nvSpPr>
@@ -2792,6 +2828,10 @@
           </a:solidFill>
           <a:ln/>
         </p:spPr>
+        <p:txBody>
+          <a:bodyPr/>
+          <a:p/>
+        </p:txBody>
       </p:sp>
       <p:sp>
         <p:nvSpPr>
@@ -2938,6 +2978,10 @@
             </a:outerShdw>
           </a:effectLst>
         </p:spPr>
+        <p:txBody>
+          <a:bodyPr/>
+          <a:p/>
+        </p:txBody>
       </p:sp>
       <p:sp>
         <p:nvSpPr>
@@ -2958,6 +3002,10 @@
           </a:solidFill>
           <a:ln/>
         </p:spPr>
+        <p:txBody>
+          <a:bodyPr/>
+          <a:p/>
+        </p:txBody>
       </p:sp>
       <p:sp>
         <p:nvSpPr>
@@ -3104,6 +3152,10 @@
             </a:outerShdw>
           </a:effectLst>
         </p:spPr>
+        <p:txBody>
+          <a:bodyPr/>
+          <a:p/>
+        </p:txBody>
       </p:sp>
       <p:sp>
         <p:nvSpPr>
@@ -3124,6 +3176,10 @@
           </a:solidFill>
           <a:ln/>
         </p:spPr>
+        <p:txBody>
+          <a:bodyPr/>
+          <a:p/>
+        </p:txBody>
       </p:sp>
       <p:sp>
         <p:nvSpPr>
@@ -3309,6 +3365,10 @@
             </a:outerShdw>
           </a:effectLst>
         </p:spPr>
+        <p:txBody>
+          <a:bodyPr/>
+          <a:p/>
+        </p:txBody>
       </p:sp>
       <p:sp>
         <p:nvSpPr>
@@ -3329,6 +3389,10 @@
           </a:solidFill>
           <a:ln/>
         </p:spPr>
+        <p:txBody>
+          <a:bodyPr/>
+          <a:p/>
+        </p:txBody>
       </p:sp>
       <p:sp>
         <p:nvSpPr>
@@ -3397,6 +3461,10 @@
             </a:outerShdw>
           </a:effectLst>
         </p:spPr>
+        <p:txBody>
+          <a:bodyPr/>
+          <a:p/>
+        </p:txBody>
       </p:sp>
       <p:sp>
         <p:nvSpPr>
@@ -3417,6 +3485,10 @@
           </a:solidFill>
           <a:ln/>
         </p:spPr>
+        <p:txBody>
+          <a:bodyPr/>
+          <a:p/>
+        </p:txBody>
       </p:sp>
       <p:sp>
         <p:nvSpPr>
@@ -3485,6 +3557,10 @@
             </a:outerShdw>
           </a:effectLst>
         </p:spPr>
+        <p:txBody>
+          <a:bodyPr/>
+          <a:p/>
+        </p:txBody>
       </p:sp>
       <p:sp>
         <p:nvSpPr>
@@ -3505,6 +3581,10 @@
           </a:solidFill>
           <a:ln/>
         </p:spPr>
+        <p:txBody>
+          <a:bodyPr/>
+          <a:p/>
+        </p:txBody>
       </p:sp>
       <p:sp>
         <p:nvSpPr>
@@ -3637,6 +3717,10 @@
             </a:outerShdw>
           </a:effectLst>
         </p:spPr>
+        <p:txBody>
+          <a:bodyPr/>
+          <a:p/>
+        </p:txBody>
       </p:sp>
       <p:sp>
         <p:nvSpPr>
@@ -3657,6 +3741,10 @@
           </a:solidFill>
           <a:ln/>
         </p:spPr>
+        <p:txBody>
+          <a:bodyPr/>
+          <a:p/>
+        </p:txBody>
       </p:sp>
       <p:sp>
         <p:nvSpPr>
@@ -3725,6 +3813,10 @@
             </a:outerShdw>
           </a:effectLst>
         </p:spPr>
+        <p:txBody>
+          <a:bodyPr/>
+          <a:p/>
+        </p:txBody>
       </p:sp>
       <p:sp>
         <p:nvSpPr>
@@ -3745,6 +3837,10 @@
           </a:solidFill>
           <a:ln/>
         </p:spPr>
+        <p:txBody>
+          <a:bodyPr/>
+          <a:p/>
+        </p:txBody>
       </p:sp>
       <p:sp>
         <p:nvSpPr>
@@ -3813,6 +3909,10 @@
             </a:outerShdw>
           </a:effectLst>
         </p:spPr>
+        <p:txBody>
+          <a:bodyPr/>
+          <a:p/>
+        </p:txBody>
       </p:sp>
       <p:sp>
         <p:nvSpPr>
@@ -3833,6 +3933,10 @@
           </a:solidFill>
           <a:ln/>
         </p:spPr>
+        <p:txBody>
+          <a:bodyPr/>
+          <a:p/>
+        </p:txBody>
       </p:sp>
       <p:sp>
         <p:nvSpPr>
@@ -3901,6 +4005,10 @@
             </a:outerShdw>
           </a:effectLst>
         </p:spPr>
+        <p:txBody>
+          <a:bodyPr/>
+          <a:p/>
+        </p:txBody>
       </p:sp>
       <p:sp>
         <p:nvSpPr>
@@ -3921,6 +4029,10 @@
           </a:solidFill>
           <a:ln/>
         </p:spPr>
+        <p:txBody>
+          <a:bodyPr/>
+          <a:p/>
+        </p:txBody>
       </p:sp>
       <p:sp>
         <p:nvSpPr>
@@ -3989,6 +4101,10 @@
             </a:outerShdw>
           </a:effectLst>
         </p:spPr>
+        <p:txBody>
+          <a:bodyPr/>
+          <a:p/>
+        </p:txBody>
       </p:sp>
       <p:sp>
         <p:nvSpPr>
@@ -4009,6 +4125,10 @@
           </a:solidFill>
           <a:ln/>
         </p:spPr>
+        <p:txBody>
+          <a:bodyPr/>
+          <a:p/>
+        </p:txBody>
       </p:sp>
       <p:sp>
         <p:nvSpPr>
@@ -4156,6 +4276,10 @@
             </a:outerShdw>
           </a:effectLst>
         </p:spPr>
+        <p:txBody>
+          <a:bodyPr/>
+          <a:p/>
+        </p:txBody>
       </p:sp>
       <p:sp>
         <p:nvSpPr>
@@ -4176,6 +4300,10 @@
           </a:solidFill>
           <a:ln/>
         </p:spPr>
+        <p:txBody>
+          <a:bodyPr/>
+          <a:p/>
+        </p:txBody>
       </p:sp>
       <p:sp>
         <p:nvSpPr>
@@ -4340,6 +4468,10 @@
             </a:outerShdw>
           </a:effectLst>
         </p:spPr>
+        <p:txBody>
+          <a:bodyPr/>
+          <a:p/>
+        </p:txBody>
       </p:sp>
       <p:sp>
         <p:nvSpPr>
@@ -4360,6 +4492,10 @@
           </a:solidFill>
           <a:ln/>
         </p:spPr>
+        <p:txBody>
+          <a:bodyPr/>
+          <a:p/>
+        </p:txBody>
       </p:sp>
       <p:sp>
         <p:nvSpPr>
@@ -4680,6 +4816,8 @@
               </a:rPr>
               <a:t>Internationale productieketen = productieproces verdeeld over meerdere landen</a:t>
             </a:r>
+          </a:p>
+          <a:p>
             <a:pPr algn="l" marL="342900" indent="-342900">
               <a:lnSpc>
                 <a:spcPct val="160000"/>
@@ -4701,6 +4839,8 @@
               </a:rPr>
               <a:t>Elk land specialiseert in onderdelen met de laagste comparatieve kosten</a:t>
             </a:r>
+          </a:p>
+          <a:p>
             <a:pPr algn="l" marL="342900" indent="-342900">
               <a:lnSpc>
                 <a:spcPct val="160000"/>
@@ -4722,6 +4862,8 @@
               </a:rPr>
               <a:t>Voorwaarden: goede communicatie, lage transportkosten, coördinatie</a:t>
             </a:r>
+          </a:p>
+          <a:p>
             <a:pPr algn="l" marL="342900" indent="-342900">
               <a:lnSpc>
                 <a:spcPct val="160000"/>
@@ -4743,6 +4885,8 @@
               </a:rPr>
               <a:t>Voordelen: lagere kosten, werkgelegenheid, kennisoverdracht</a:t>
             </a:r>
+          </a:p>
+          <a:p>
             <a:pPr algn="l" marL="342900" indent="-342900">
               <a:lnSpc>
                 <a:spcPct val="160000"/>
@@ -4764,7 +4908,6 @@
               </a:rPr>
               <a:t>Kritiek: loonongelijkheid, milieu, kwetsbaarheid bij verstoringen</a:t>
             </a:r>
-            <a:endParaRPr lang="en-US" sz="1500" dirty="0"/>
           </a:p>
         </p:txBody>
       </p:sp>
